--- a/library/seminars/sem-06/rendered/sem-06-n39.pptx
+++ b/library/seminars/sem-06/rendered/sem-06-n39.pptx
@@ -502,7 +502,7 @@
           <a:lstStyle/>
           <a:p>
             <a:r>
-              <a:t>Вопрос — да или нет, а ответ собирается из контроллера, пяти конфигов, пятнадцати миграций и десятка тестов. Выберите карточку. И сразу вторым ходом: назовите вслух, за счёт чего она выигрывает.</a:t>
+              <a:t>Что править — известно. Где править — лежит в сорока файлах, из которых нужны четыре. Выберите карточку. И сразу вторым ходом: назовите вслух, за счёт чего она выигрывает.</a:t>
             </a:r>
           </a:p>
           <a:p/>
@@ -538,10 +538,20 @@
           <a:p>
             <a:r>
               <a:rPr i="1"/>
-              <a:t>Если выберут коллегу или скилл.</a:t>
-            </a:r>
-            <a:r>
-              <a:t> Принимаю наравне с третьей карточкой: у обеих есть своя правда, и она разобрана на следующем экране построчно. Тем, кто выбрал коллегу, стоит сказать отдельно, что это единственный вариант, который может ответить за минуту, — и единственный, который зависит от чужого расписания.</a:t>
+              <a:t>Если выберут вторую сессию.</a:t>
+            </a:r>
+            <a:r>
+              <a:t> Принимаю всерьёз и благодарю: это первое, что приходит в голову любому, кто работает в двух вкладках. Прошу только добавить вслух, что произойдёт дальше, когда ответ получен, — ответ почти всегда приходит сам: «перенесу». Вот это слово и разбираем следующим экраном.</a:t>
+            </a:r>
+          </a:p>
+          <a:p/>
+          <a:p>
+            <a:r>
+              <a:rPr i="1"/>
+              <a:t>Если выберут коллегу.</a:t>
+            </a:r>
+            <a:r>
+              <a:t> Принимаю наравне с четвёртой карточкой: у обеих есть своя правда, и она разобрана на следующем экране построчно. Стоит сказать отдельно, что коллега — единственный вариант, способный ответить за минуту, и единственный, который зависит от чужого расписания.</a:t>
             </a:r>
           </a:p>
           <a:p/>
@@ -561,7 +571,7 @@
               <a:t>Если спросят, можно ли выбрать две.</a:t>
             </a:r>
             <a:r>
-              <a:t> Можно, и это честный ответ: в живой работе третью и четвёртую совмещают — сначала роль, потом тот же вопрос скиллом, когда он повторился. Прошу тогда назвать, какая из двух первая и почему.</a:t>
+              <a:t> Можно, и это честный ответ: в живой работе четвёртую совмещают с третьей — сначала роль, потом короткий разговор с тем, кто эти миграции писал. Прошу тогда назвать, какая из двух первая и почему.</a:t>
             </a:r>
           </a:p>
           <a:p/>
@@ -571,7 +581,7 @@
               <a:t>Если прозвучит ответ, которого нет на карточках</a:t>
             </a:r>
             <a:r>
-              <a:t> — «спросить того, кто это писал», «посмотреть в истории коммитов»: записываю шестым вариантом и возвращаю на разборе. Карточки задают поле выбора; границей этого поля они не являются.</a:t>
+              <a:t> — «спросить того, кто это писал», «посмотреть в истории коммитов», «записать вопрос скиллом на будущее»: записываю шестым вариантом и возвращаю на разборе. Карточки задают поле выбора; границей этого поля они не являются.</a:t>
             </a:r>
           </a:p>
         </p:txBody>
@@ -3635,7 +3645,7 @@
         </p:nvSpPr>
         <p:spPr>
           <a:xfrm>
-            <a:off x="502920" y="1591970"/>
+            <a:off x="502920" y="1671523"/>
             <a:ext cx="32004" cy="317754"/>
           </a:xfrm>
           <a:prstGeom prst="rect">
@@ -3679,7 +3689,7 @@
         </p:nvSpPr>
         <p:spPr>
           <a:xfrm>
-            <a:off x="772668" y="1646834"/>
+            <a:off x="772668" y="1726387"/>
             <a:ext cx="10730484" cy="208025"/>
           </a:xfrm>
           <a:prstGeom prst="rect">
@@ -3708,7 +3718,7 @@
                 </a:solidFill>
                 <a:latin typeface="Arial"/>
               </a:rPr>
-              <a:t>«Вопрос — да или нет, а ответ собирается из контроллера, пяти конфигов, пятнадцати миграций и десятка тестов.»</a:t>
+              <a:t>«Что править — известно. Где править — лежит в сорока файлах, из которых нужны четыре.»</a:t>
             </a:r>
           </a:p>
         </p:txBody>
@@ -3721,7 +3731,7 @@
         </p:nvSpPr>
         <p:spPr>
           <a:xfrm>
-            <a:off x="502920" y="2613812"/>
+            <a:off x="502920" y="2693365"/>
             <a:ext cx="11183112" cy="822960"/>
           </a:xfrm>
           <a:prstGeom prst="roundRect">
@@ -3769,7 +3779,7 @@
         </p:nvSpPr>
         <p:spPr>
           <a:xfrm>
-            <a:off x="722376" y="2741828"/>
+            <a:off x="722376" y="2821381"/>
             <a:ext cx="10634472" cy="566928"/>
           </a:xfrm>
           <a:prstGeom prst="rect">
@@ -3811,12 +3821,12 @@
         </p:nvSpPr>
         <p:spPr>
           <a:xfrm>
-            <a:off x="502920" y="4104284"/>
-            <a:ext cx="2119579" cy="1305306"/>
+            <a:off x="502920" y="4183837"/>
+            <a:ext cx="2119579" cy="1106424"/>
           </a:xfrm>
           <a:prstGeom prst="roundRect">
             <a:avLst>
-              <a:gd name="adj" fmla="val 23350"/>
+              <a:gd name="adj" fmla="val 25000"/>
             </a:avLst>
           </a:prstGeom>
           <a:solidFill>
@@ -3859,8 +3869,8 @@
         </p:nvSpPr>
         <p:spPr>
           <a:xfrm>
-            <a:off x="612648" y="4104284"/>
-            <a:ext cx="1900123" cy="1305306"/>
+            <a:off x="612648" y="4183837"/>
+            <a:ext cx="1900123" cy="1106424"/>
           </a:xfrm>
           <a:prstGeom prst="rect">
             <a:avLst/>
@@ -3888,7 +3898,7 @@
                 </a:solidFill>
                 <a:latin typeface="Arial"/>
               </a:rPr>
-              <a:t>прочитать все файлы самому, в этой же сессии</a:t>
+              <a:t>прочитать все сорок файлов самому, в этой же сессии</a:t>
             </a:r>
           </a:p>
         </p:txBody>
@@ -3901,12 +3911,12 @@
         </p:nvSpPr>
         <p:spPr>
           <a:xfrm>
-            <a:off x="2768803" y="4104284"/>
-            <a:ext cx="2119579" cy="1305306"/>
+            <a:off x="2768803" y="4183837"/>
+            <a:ext cx="2119579" cy="1106424"/>
           </a:xfrm>
           <a:prstGeom prst="roundRect">
             <a:avLst>
-              <a:gd name="adj" fmla="val 23350"/>
+              <a:gd name="adj" fmla="val 25000"/>
             </a:avLst>
           </a:prstGeom>
           <a:solidFill>
@@ -3949,8 +3959,8 @@
         </p:nvSpPr>
         <p:spPr>
           <a:xfrm>
-            <a:off x="2878531" y="4104284"/>
-            <a:ext cx="1900123" cy="1305306"/>
+            <a:off x="2878531" y="4183837"/>
+            <a:ext cx="1900123" cy="1106424"/>
           </a:xfrm>
           <a:prstGeom prst="rect">
             <a:avLst/>
@@ -3978,7 +3988,7 @@
                 </a:solidFill>
                 <a:latin typeface="Arial"/>
               </a:rPr>
-              <a:t>позвать коллегу, который давно работает с тарифами</a:t>
+              <a:t>открыть вторую сессию, спросить там и перенести список руками</a:t>
             </a:r>
           </a:p>
         </p:txBody>
@@ -3991,12 +4001,12 @@
         </p:nvSpPr>
         <p:spPr>
           <a:xfrm>
-            <a:off x="5034686" y="4104284"/>
-            <a:ext cx="2119579" cy="1305306"/>
+            <a:off x="5034686" y="4183837"/>
+            <a:ext cx="2119579" cy="1106424"/>
           </a:xfrm>
           <a:prstGeom prst="roundRect">
             <a:avLst>
-              <a:gd name="adj" fmla="val 23350"/>
+              <a:gd name="adj" fmla="val 25000"/>
             </a:avLst>
           </a:prstGeom>
           <a:solidFill>
@@ -4039,8 +4049,8 @@
         </p:nvSpPr>
         <p:spPr>
           <a:xfrm>
-            <a:off x="5144414" y="4104284"/>
-            <a:ext cx="1900123" cy="1305306"/>
+            <a:off x="5144414" y="4183837"/>
+            <a:ext cx="1900123" cy="1106424"/>
           </a:xfrm>
           <a:prstGeom prst="rect">
             <a:avLst/>
@@ -4068,7 +4078,7 @@
                 </a:solidFill>
                 <a:latin typeface="Arial"/>
               </a:rPr>
-              <a:t>завести субагента: пусть читает все файлы в своём окне и вернёт короткий ответ</a:t>
+              <a:t>позвать коллегу, который давно работает с тарифами</a:t>
             </a:r>
           </a:p>
         </p:txBody>
@@ -4081,12 +4091,12 @@
         </p:nvSpPr>
         <p:spPr>
           <a:xfrm>
-            <a:off x="7300569" y="4104284"/>
-            <a:ext cx="2119579" cy="1305306"/>
+            <a:off x="7300569" y="4183837"/>
+            <a:ext cx="2119579" cy="1106424"/>
           </a:xfrm>
           <a:prstGeom prst="roundRect">
             <a:avLst>
-              <a:gd name="adj" fmla="val 23350"/>
+              <a:gd name="adj" fmla="val 25000"/>
             </a:avLst>
           </a:prstGeom>
           <a:solidFill>
@@ -4129,8 +4139,8 @@
         </p:nvSpPr>
         <p:spPr>
           <a:xfrm>
-            <a:off x="7410297" y="4104284"/>
-            <a:ext cx="1900123" cy="1305306"/>
+            <a:off x="7410297" y="4183837"/>
+            <a:ext cx="1900123" cy="1106424"/>
           </a:xfrm>
           <a:prstGeom prst="rect">
             <a:avLst/>
@@ -4158,7 +4168,7 @@
                 </a:solidFill>
                 <a:latin typeface="Arial"/>
               </a:rPr>
-              <a:t>сохранить вопрос как скилл на будущее</a:t>
+              <a:t>поручить роли: прочитает в своём контексте и вернёт список мест</a:t>
             </a:r>
           </a:p>
         </p:txBody>
@@ -4171,12 +4181,12 @@
         </p:nvSpPr>
         <p:spPr>
           <a:xfrm>
-            <a:off x="9566452" y="4104284"/>
-            <a:ext cx="2119579" cy="1305306"/>
+            <a:off x="9566452" y="4183837"/>
+            <a:ext cx="2119579" cy="1106424"/>
           </a:xfrm>
           <a:prstGeom prst="roundRect">
             <a:avLst>
-              <a:gd name="adj" fmla="val 23350"/>
+              <a:gd name="adj" fmla="val 25000"/>
             </a:avLst>
           </a:prstGeom>
           <a:solidFill>
@@ -4219,8 +4229,8 @@
         </p:nvSpPr>
         <p:spPr>
           <a:xfrm>
-            <a:off x="9676180" y="4104284"/>
-            <a:ext cx="1900123" cy="1305306"/>
+            <a:off x="9676180" y="4183837"/>
+            <a:ext cx="1900123" cy="1106424"/>
           </a:xfrm>
           <a:prstGeom prst="rect">
             <a:avLst/>
@@ -4248,7 +4258,7 @@
                 </a:solidFill>
                 <a:latin typeface="Arial"/>
               </a:rPr>
-              <a:t>ответить по памяти, без проверки</a:t>
+              <a:t>править по памяти, без поиска</a:t>
             </a:r>
           </a:p>
         </p:txBody>
@@ -4290,7 +4300,7 @@
                 </a:solidFill>
                 <a:latin typeface="Arial"/>
               </a:rPr>
-              <a:t>39</a:t>
+              <a:t>40</a:t>
             </a:r>
           </a:p>
         </p:txBody>
